--- a/docs/Wayora-Sunum.pptx
+++ b/docs/Wayora-Sunum.pptx
@@ -725,7 +725,7 @@
           <a:lstStyle/>
           <a:p>
             <a:r>
-              <a:t>Kalite deterministik guardrail’lere dayanıyor: 32 API, 4 web testi, lint, tip, build, audit, gitleaks, CodeQL ve Semgrep.</a:t>
+              <a:t>Kalite deterministik guardrail’lere dayanıyor: 51 API, 4 web testi, lint, tip, build, audit, gitleaks, CodeQL ve Semgrep.</a:t>
             </a:r>
           </a:p>
         </p:txBody>
@@ -8505,7 +8505,7 @@
                 </a:solidFill>
                 <a:latin typeface="Arial Black"/>
               </a:rPr>
-              <a:t>32</a:t>
+              <a:t>51</a:t>
             </a:r>
           </a:p>
         </p:txBody>
@@ -19481,7 +19481,7 @@
                 </a:solidFill>
                 <a:latin typeface="Consolas"/>
               </a:rPr>
-              <a:t>32 API + 4 web testi · 0 audit vulnerability · CI her PR’da</a:t>
+              <a:t>51 API + 4 web testi · 0 audit vulnerability · CI her PR’da</a:t>
             </a:r>
           </a:p>
         </p:txBody>

--- a/docs/Wayora-Sunum.pptx
+++ b/docs/Wayora-Sunum.pptx
@@ -725,7 +725,7 @@
           <a:lstStyle/>
           <a:p>
             <a:r>
-              <a:t>Kalite deterministik guardrail’lere dayanıyor: 51 API, 4 web testi, lint, tip, build, audit, gitleaks, CodeQL ve Semgrep.</a:t>
+              <a:t>Kalite deterministik guardrail’lere dayanıyor: 70 API, 6 web testi, lint, tip, build, audit, gitleaks, CodeQL ve Semgrep.</a:t>
             </a:r>
           </a:p>
         </p:txBody>
@@ -8505,7 +8505,7 @@
                 </a:solidFill>
                 <a:latin typeface="Arial Black"/>
               </a:rPr>
-              <a:t>51</a:t>
+              <a:t>70</a:t>
             </a:r>
           </a:p>
         </p:txBody>
@@ -8583,7 +8583,7 @@
                 </a:solidFill>
                 <a:latin typeface="Arial Black"/>
               </a:rPr>
-              <a:t>4</a:t>
+              <a:t>6</a:t>
             </a:r>
           </a:p>
         </p:txBody>
@@ -19481,7 +19481,7 @@
                 </a:solidFill>
                 <a:latin typeface="Consolas"/>
               </a:rPr>
-              <a:t>51 API + 4 web testi · 0 audit vulnerability · CI her PR’da</a:t>
+              <a:t>70 API + 6 web testi · 0 audit vulnerability · CI her PR’da</a:t>
             </a:r>
           </a:p>
         </p:txBody>
